--- a/slides/intro_to_deep_learning.pptx
+++ b/slides/intro_to_deep_learning.pptx
@@ -387,25 +387,29 @@
           </a:p>
           <a:p>
             <a:r>
+              <a:rPr lang="en-GB" dirty="0"/>
+              <a:t>In this section we’ll cover: </a:t>
+            </a:r>
+            <a:r>
               <a:rPr dirty="0"/>
-              <a:t>The goal here is not to make everyone an expert in neural networks in 45 minutes. The goal is to build a shared </a:t>
+              <a:t>what we mean by representations, embeddings, neural network layers, losses, gradients, sequence models, and autoregressive generation.</a:t>
+            </a:r>
+          </a:p>
+          <a:p>
+            <a:endParaRPr dirty="0"/>
+          </a:p>
+          <a:p>
+            <a:r>
+              <a:rPr dirty="0"/>
+              <a:t>Th</a:t>
             </a:r>
             <a:r>
               <a:rPr lang="en-GB" dirty="0"/>
-              <a:t>vocab</a:t>
+              <a:t>ese concepts will be important </a:t>
             </a:r>
             <a:r>
               <a:rPr dirty="0"/>
-              <a:t>: what we mean by representations, embeddings, neural network layers, losses, gradients, sequence models, and autoregressive generation.</a:t>
-            </a:r>
-          </a:p>
-          <a:p>
-            <a:endParaRPr dirty="0"/>
-          </a:p>
-          <a:p>
-            <a:r>
-              <a:rPr dirty="0"/>
-              <a:t>That shared language matters because the rest of the workshop is about </a:t>
+              <a:t>because the rest of the workshop is about </a:t>
             </a:r>
             <a:r>
               <a:rPr dirty="0" err="1"/>
@@ -438,7 +442,31 @@
           <a:p>
             <a:r>
               <a:rPr dirty="0"/>
-              <a:t>So this part is the ramp. We are going from ordinary feature vectors to generated crystal structures."</a:t>
+              <a:t>So</a:t>
+            </a:r>
+            <a:r>
+              <a:rPr lang="en-GB" dirty="0"/>
+              <a:t> for this workshop, w</a:t>
+            </a:r>
+            <a:r>
+              <a:rPr dirty="0"/>
+              <a:t>e </a:t>
+            </a:r>
+            <a:r>
+              <a:rPr lang="en-GB" dirty="0"/>
+              <a:t>will hopefully take you all the way </a:t>
+            </a:r>
+            <a:r>
+              <a:rPr dirty="0"/>
+              <a:t>from ordinary feature vectors to generated crystal structures</a:t>
+            </a:r>
+            <a:r>
+              <a:rPr lang="en-GB" dirty="0"/>
+              <a:t> conditioned on functional properties of interest</a:t>
+            </a:r>
+            <a:r>
+              <a:rPr dirty="0"/>
+              <a:t>"</a:t>
             </a:r>
           </a:p>
           <a:p>
@@ -6754,7 +6782,7 @@
           <a:lstStyle/>
           <a:p>
             <a:fld id="{4AAD737D-49FC-4931-8044-95F5E6B6FF62}" type="datetime1">
-              <a:t>7/28/2026</a:t>
+              <a:t>7/29/2026</a:t>
             </a:fld>
             <a:endParaRPr/>
           </a:p>
@@ -6951,7 +6979,7 @@
           <a:lstStyle/>
           <a:p>
             <a:fld id="{6D28F3E0-6761-4F38-B0D2-D3BBAECA68B2}" type="datetime1">
-              <a:t>7/28/2026</a:t>
+              <a:t>7/29/2026</a:t>
             </a:fld>
             <a:endParaRPr/>
           </a:p>
@@ -7158,7 +7186,7 @@
           <a:lstStyle/>
           <a:p>
             <a:fld id="{A1E64DA5-32E5-4C84-B93B-409B4F3EFA94}" type="datetime1">
-              <a:t>7/28/2026</a:t>
+              <a:t>7/29/2026</a:t>
             </a:fld>
             <a:endParaRPr/>
           </a:p>
@@ -7675,7 +7703,7 @@
               <a:buNone/>
             </a:pPr>
             <a:fld id="{82642433-B20B-41CB-B257-E97B7A39CF4D}" type="datetime1">
-              <a:t>7/28/2026</a:t>
+              <a:t>7/29/2026</a:t>
             </a:fld>
             <a:endParaRPr/>
           </a:p>
@@ -8452,7 +8480,7 @@
               <a:buNone/>
             </a:pPr>
             <a:fld id="{1EC77A8F-26E6-4293-8E2E-9119200301AF}" type="datetime1">
-              <a:t>7/28/2026</a:t>
+              <a:t>7/29/2026</a:t>
             </a:fld>
             <a:endParaRPr/>
           </a:p>
@@ -9056,7 +9084,7 @@
               <a:buNone/>
             </a:pPr>
             <a:fld id="{697A7309-303D-4D64-BE01-AA541DB05D68}" type="datetime1">
-              <a:t>7/28/2026</a:t>
+              <a:t>7/29/2026</a:t>
             </a:fld>
             <a:endParaRPr/>
           </a:p>
@@ -9718,7 +9746,7 @@
               <a:buNone/>
             </a:pPr>
             <a:fld id="{A5340B65-517C-469D-A3F4-EA40C2771EC6}" type="datetime1">
-              <a:t>7/28/2026</a:t>
+              <a:t>7/29/2026</a:t>
             </a:fld>
             <a:endParaRPr/>
           </a:p>
@@ -10166,7 +10194,7 @@
               <a:buNone/>
             </a:pPr>
             <a:fld id="{49F16B23-CAA7-4BAB-B19F-7708C69D0279}" type="datetime1">
-              <a:t>7/28/2026</a:t>
+              <a:t>7/29/2026</a:t>
             </a:fld>
             <a:endParaRPr/>
           </a:p>
@@ -10838,7 +10866,7 @@
               <a:buNone/>
             </a:pPr>
             <a:fld id="{D6E0A371-48E0-4D70-9938-7EAA11F25D6B}" type="datetime1">
-              <a:t>7/28/2026</a:t>
+              <a:t>7/29/2026</a:t>
             </a:fld>
             <a:endParaRPr/>
           </a:p>
@@ -11061,7 +11089,7 @@
           <a:lstStyle/>
           <a:p>
             <a:fld id="{A8BE690D-6B60-435F-8D67-968E335AF7A4}" type="datetime1">
-              <a:t>7/28/2026</a:t>
+              <a:t>7/29/2026</a:t>
             </a:fld>
             <a:endParaRPr/>
           </a:p>
@@ -11895,7 +11923,7 @@
               <a:buNone/>
             </a:pPr>
             <a:fld id="{1670726F-BED8-4EFC-A674-72E147BEF1CD}" type="datetime1">
-              <a:t>7/28/2026</a:t>
+              <a:t>7/29/2026</a:t>
             </a:fld>
             <a:endParaRPr/>
           </a:p>
@@ -12983,7 +13011,7 @@
               <a:buNone/>
             </a:pPr>
             <a:fld id="{A10B1F04-7F66-485F-9A4F-09828C6E769B}" type="datetime1">
-              <a:t>7/28/2026</a:t>
+              <a:t>7/29/2026</a:t>
             </a:fld>
             <a:endParaRPr/>
           </a:p>
@@ -13550,7 +13578,7 @@
               <a:buNone/>
             </a:pPr>
             <a:fld id="{4E4007F7-B6F2-4822-962A-9A59D6AFEBA1}" type="datetime1">
-              <a:t>7/28/2026</a:t>
+              <a:t>7/29/2026</a:t>
             </a:fld>
             <a:endParaRPr/>
           </a:p>
@@ -14085,7 +14113,7 @@
               <a:buNone/>
             </a:pPr>
             <a:fld id="{9A9056D3-5D11-47B3-A5B9-21163F636012}" type="datetime1">
-              <a:t>7/28/2026</a:t>
+              <a:t>7/29/2026</a:t>
             </a:fld>
             <a:endParaRPr/>
           </a:p>
@@ -14530,7 +14558,7 @@
               <a:buNone/>
             </a:pPr>
             <a:fld id="{687A9B91-BCB0-4311-9D97-1BA171EF48E3}" type="datetime1">
-              <a:t>7/28/2026</a:t>
+              <a:t>7/29/2026</a:t>
             </a:fld>
             <a:endParaRPr/>
           </a:p>
@@ -16020,7 +16048,7 @@
               <a:buNone/>
             </a:pPr>
             <a:fld id="{CB859E06-8BAF-472C-BC33-8A47B681E534}" type="datetime1">
-              <a:t>7/28/2026</a:t>
+              <a:t>7/29/2026</a:t>
             </a:fld>
             <a:endParaRPr/>
           </a:p>
@@ -16167,7 +16195,7 @@
               <a:buNone/>
             </a:pPr>
             <a:fld id="{0890B1B8-C316-4AF1-BC86-6582A5A9C4AD}" type="datetime1">
-              <a:t>7/28/2026</a:t>
+              <a:t>7/29/2026</a:t>
             </a:fld>
             <a:endParaRPr/>
           </a:p>
@@ -17373,7 +17401,7 @@
               <a:buNone/>
             </a:pPr>
             <a:fld id="{89ED1F49-2C9F-41C9-BEFF-D07C83F9F3BE}" type="datetime1">
-              <a:t>7/28/2026</a:t>
+              <a:t>7/29/2026</a:t>
             </a:fld>
             <a:endParaRPr/>
           </a:p>
@@ -19318,7 +19346,7 @@
               <a:buNone/>
             </a:pPr>
             <a:fld id="{AA9FB664-5450-43A7-96F7-F0350C05EDCD}" type="datetime1">
-              <a:t>7/28/2026</a:t>
+              <a:t>7/29/2026</a:t>
             </a:fld>
             <a:endParaRPr/>
           </a:p>
@@ -20839,7 +20867,7 @@
               <a:buNone/>
             </a:pPr>
             <a:fld id="{99E57A48-6B55-44AD-971C-DE2D9E73A294}" type="datetime1">
-              <a:t>7/28/2026</a:t>
+              <a:t>7/29/2026</a:t>
             </a:fld>
             <a:endParaRPr/>
           </a:p>
@@ -21126,7 +21154,7 @@
           <a:lstStyle/>
           <a:p>
             <a:fld id="{E18D2B00-560F-4598-A72C-65DD2B6AFE59}" type="datetime1">
-              <a:t>7/28/2026</a:t>
+              <a:t>7/29/2026</a:t>
             </a:fld>
             <a:endParaRPr/>
           </a:p>
@@ -21511,7 +21539,7 @@
               <a:buNone/>
             </a:pPr>
             <a:fld id="{49C21201-3C43-47EC-82E9-CD077C959CE9}" type="datetime1">
-              <a:t>7/28/2026</a:t>
+              <a:t>7/29/2026</a:t>
             </a:fld>
             <a:endParaRPr/>
           </a:p>
@@ -21823,7 +21851,7 @@
               <a:buNone/>
             </a:pPr>
             <a:fld id="{30DA48D5-FBA5-480F-B359-055D158D0DB7}" type="datetime1">
-              <a:t>7/28/2026</a:t>
+              <a:t>7/29/2026</a:t>
             </a:fld>
             <a:endParaRPr/>
           </a:p>
@@ -22049,7 +22077,7 @@
               <a:buNone/>
             </a:pPr>
             <a:fld id="{363BFF66-872A-45C0-B91A-4420AF882649}" type="datetime1">
-              <a:t>7/28/2026</a:t>
+              <a:t>7/29/2026</a:t>
             </a:fld>
             <a:endParaRPr/>
           </a:p>
@@ -22332,7 +22360,7 @@
           </a:lstStyle>
           <a:p>
             <a:fld id="{5F25E803-9395-4DA8-A10C-F9389468F903}" type="datetime1">
-              <a:t>7/28/2026</a:t>
+              <a:t>7/29/2026</a:t>
             </a:fld>
             <a:endParaRPr/>
           </a:p>
@@ -22638,7 +22666,7 @@
           <a:lstStyle/>
           <a:p>
             <a:fld id="{87A6D153-A536-4354-AC9C-B3D2ADE9B5A7}" type="datetime1">
-              <a:t>7/28/2026</a:t>
+              <a:t>7/29/2026</a:t>
             </a:fld>
             <a:endParaRPr/>
           </a:p>
@@ -23056,7 +23084,7 @@
           <a:lstStyle/>
           <a:p>
             <a:fld id="{25CB44C7-FFF1-4AE5-BE08-00AC9CA8FEF6}" type="datetime1">
-              <a:t>7/28/2026</a:t>
+              <a:t>7/29/2026</a:t>
             </a:fld>
             <a:endParaRPr/>
           </a:p>
@@ -23191,7 +23219,7 @@
           <a:lstStyle/>
           <a:p>
             <a:fld id="{DF77C250-42C0-4147-BEDD-AE284B3C5684}" type="datetime1">
-              <a:t>7/28/2026</a:t>
+              <a:t>7/29/2026</a:t>
             </a:fld>
             <a:endParaRPr/>
           </a:p>
@@ -23299,7 +23327,7 @@
           <a:lstStyle/>
           <a:p>
             <a:fld id="{3D4BA764-4259-4888-A41E-9EFA14276F87}" type="datetime1">
-              <a:t>7/28/2026</a:t>
+              <a:t>7/29/2026</a:t>
             </a:fld>
             <a:endParaRPr/>
           </a:p>
@@ -23620,7 +23648,7 @@
           <a:lstStyle/>
           <a:p>
             <a:fld id="{7D76D347-FC17-42B9-8F7F-762C11D6AFD2}" type="datetime1">
-              <a:t>7/28/2026</a:t>
+              <a:t>7/29/2026</a:t>
             </a:fld>
             <a:endParaRPr/>
           </a:p>
@@ -23904,7 +23932,7 @@
           <a:lstStyle/>
           <a:p>
             <a:fld id="{1001E8DF-12A5-4377-8661-A77C58EB4EDA}" type="datetime1">
-              <a:t>7/28/2026</a:t>
+              <a:t>7/29/2026</a:t>
             </a:fld>
             <a:endParaRPr/>
           </a:p>
@@ -24145,7 +24173,7 @@
           </a:lstStyle>
           <a:p>
             <a:fld id="{32EAC8CF-365A-41BE-944A-09CD166739EC}" type="datetime1">
-              <a:t>7/28/2026</a:t>
+              <a:t>7/29/2026</a:t>
             </a:fld>
             <a:endParaRPr/>
           </a:p>
@@ -24716,7 +24744,7 @@
               <a:buNone/>
             </a:pPr>
             <a:fld id="{39D9E0E4-1A84-4FCD-91FC-29802B376D16}" type="datetime1">
-              <a:t>7/28/2026</a:t>
+              <a:t>7/29/2026</a:t>
             </a:fld>
             <a:endParaRPr/>
           </a:p>
@@ -25276,8 +25304,8 @@
           <a:lstStyle/>
           <a:p>
             <a:fld id="{07632CA1-C1D8-439B-AD39-B773A9E874B7}" type="datetime1">
-              <a:rPr/>
-              <a:t>7/28/2026</a:t>
+              <a:rPr lang="en-US"/>
+              <a:t>7/29/2026</a:t>
             </a:fld>
             <a:endParaRPr/>
           </a:p>
@@ -25583,8 +25611,8 @@
               <a:buNone/>
             </a:pPr>
             <a:fld id="{927CB23C-152D-4FC1-A05B-C7A39928CFCF}" type="datetime1">
-              <a:rPr/>
-              <a:t>7/28/2026</a:t>
+              <a:rPr lang="en-US"/>
+              <a:t>7/29/2026</a:t>
             </a:fld>
             <a:endParaRPr/>
           </a:p>
@@ -26070,8 +26098,8 @@
               <a:buNone/>
             </a:pPr>
             <a:fld id="{CC32B223-3CB0-41D0-BAA2-CF31AD8EE83B}" type="datetime1">
-              <a:rPr/>
-              <a:t>7/28/2026</a:t>
+              <a:rPr lang="en-US"/>
+              <a:t>7/29/2026</a:t>
             </a:fld>
             <a:endParaRPr/>
           </a:p>
@@ -26496,8 +26524,8 @@
               <a:buNone/>
             </a:pPr>
             <a:fld id="{C3C9D3BB-9C8C-48CF-9F72-1C4997648666}" type="datetime1">
-              <a:rPr/>
-              <a:t>7/28/2026</a:t>
+              <a:rPr lang="en-US"/>
+              <a:t>7/29/2026</a:t>
             </a:fld>
             <a:endParaRPr/>
           </a:p>
@@ -27147,8 +27175,8 @@
           </a:p>
         </p:txBody>
       </p:sp>
-      <mc:AlternateContent xmlns:mc="http://schemas.openxmlformats.org/markup-compatibility/2006">
-        <mc:Choice xmlns:a14="http://schemas.microsoft.com/office/drawing/2010/main" Requires="a14">
+      <mc:AlternateContent xmlns:mc="http://schemas.openxmlformats.org/markup-compatibility/2006" xmlns:a14="http://schemas.microsoft.com/office/drawing/2010/main">
+        <mc:Choice Requires="a14">
           <p:sp>
             <p:nvSpPr>
               <p:cNvPr id="12" name="TextBox 11">
@@ -27265,7 +27293,7 @@
             </p:txBody>
           </p:sp>
         </mc:Choice>
-        <mc:Fallback>
+        <mc:Fallback xmlns="">
           <p:sp>
             <p:nvSpPr>
               <p:cNvPr id="12" name="TextBox 11">
@@ -27310,8 +27338,8 @@
           </p:sp>
         </mc:Fallback>
       </mc:AlternateContent>
-      <mc:AlternateContent xmlns:mc="http://schemas.openxmlformats.org/markup-compatibility/2006">
-        <mc:Choice xmlns:a14="http://schemas.microsoft.com/office/drawing/2010/main" Requires="a14">
+      <mc:AlternateContent xmlns:mc="http://schemas.openxmlformats.org/markup-compatibility/2006" xmlns:a14="http://schemas.microsoft.com/office/drawing/2010/main">
+        <mc:Choice Requires="a14">
           <p:sp>
             <p:nvSpPr>
               <p:cNvPr id="13" name="TextBox 12">
@@ -27474,7 +27502,7 @@
             </p:txBody>
           </p:sp>
         </mc:Choice>
-        <mc:Fallback>
+        <mc:Fallback xmlns="">
           <p:sp>
             <p:nvSpPr>
               <p:cNvPr id="13" name="TextBox 12">
@@ -27519,8 +27547,8 @@
           </p:sp>
         </mc:Fallback>
       </mc:AlternateContent>
-      <mc:AlternateContent xmlns:mc="http://schemas.openxmlformats.org/markup-compatibility/2006">
-        <mc:Choice xmlns:a14="http://schemas.microsoft.com/office/drawing/2010/main" Requires="a14">
+      <mc:AlternateContent xmlns:mc="http://schemas.openxmlformats.org/markup-compatibility/2006" xmlns:a14="http://schemas.microsoft.com/office/drawing/2010/main">
+        <mc:Choice Requires="a14">
           <p:sp>
             <p:nvSpPr>
               <p:cNvPr id="14" name="TextBox 13">
@@ -27588,7 +27616,7 @@
             </p:txBody>
           </p:sp>
         </mc:Choice>
-        <mc:Fallback>
+        <mc:Fallback xmlns="">
           <p:sp>
             <p:nvSpPr>
               <p:cNvPr id="14" name="TextBox 13">
@@ -27633,8 +27661,8 @@
           </p:sp>
         </mc:Fallback>
       </mc:AlternateContent>
-      <mc:AlternateContent xmlns:mc="http://schemas.openxmlformats.org/markup-compatibility/2006">
-        <mc:Choice xmlns:a14="http://schemas.microsoft.com/office/drawing/2010/main" Requires="a14">
+      <mc:AlternateContent xmlns:mc="http://schemas.openxmlformats.org/markup-compatibility/2006" xmlns:a14="http://schemas.microsoft.com/office/drawing/2010/main">
+        <mc:Choice Requires="a14">
           <p:sp>
             <p:nvSpPr>
               <p:cNvPr id="15" name="TextBox 14">
@@ -27702,7 +27730,7 @@
             </p:txBody>
           </p:sp>
         </mc:Choice>
-        <mc:Fallback>
+        <mc:Fallback xmlns="">
           <p:sp>
             <p:nvSpPr>
               <p:cNvPr id="15" name="TextBox 14">
@@ -27747,8 +27775,8 @@
           </p:sp>
         </mc:Fallback>
       </mc:AlternateContent>
-      <mc:AlternateContent xmlns:mc="http://schemas.openxmlformats.org/markup-compatibility/2006">
-        <mc:Choice xmlns:a14="http://schemas.microsoft.com/office/drawing/2010/main" Requires="a14">
+      <mc:AlternateContent xmlns:mc="http://schemas.openxmlformats.org/markup-compatibility/2006" xmlns:a14="http://schemas.microsoft.com/office/drawing/2010/main">
+        <mc:Choice Requires="a14">
           <p:sp>
             <p:nvSpPr>
               <p:cNvPr id="16" name="TextBox 15">
@@ -27816,7 +27844,7 @@
             </p:txBody>
           </p:sp>
         </mc:Choice>
-        <mc:Fallback>
+        <mc:Fallback xmlns="">
           <p:sp>
             <p:nvSpPr>
               <p:cNvPr id="16" name="TextBox 15">
@@ -27861,8 +27889,8 @@
           </p:sp>
         </mc:Fallback>
       </mc:AlternateContent>
-      <mc:AlternateContent xmlns:mc="http://schemas.openxmlformats.org/markup-compatibility/2006">
-        <mc:Choice xmlns:a14="http://schemas.microsoft.com/office/drawing/2010/main" Requires="a14">
+      <mc:AlternateContent xmlns:mc="http://schemas.openxmlformats.org/markup-compatibility/2006" xmlns:a14="http://schemas.microsoft.com/office/drawing/2010/main">
+        <mc:Choice Requires="a14">
           <p:sp>
             <p:nvSpPr>
               <p:cNvPr id="17" name="TextBox 16">
@@ -27930,7 +27958,7 @@
             </p:txBody>
           </p:sp>
         </mc:Choice>
-        <mc:Fallback>
+        <mc:Fallback xmlns="">
           <p:sp>
             <p:nvSpPr>
               <p:cNvPr id="17" name="TextBox 16">
@@ -28295,8 +28323,8 @@
               <a:buNone/>
             </a:pPr>
             <a:fld id="{6B8A1ED4-C820-4B2D-A4D1-F54118843A6F}" type="datetime1">
-              <a:rPr/>
-              <a:t>7/28/2026</a:t>
+              <a:rPr lang="en-US"/>
+              <a:t>7/29/2026</a:t>
             </a:fld>
             <a:endParaRPr/>
           </a:p>
@@ -28603,8 +28631,8 @@
           </a:p>
         </p:txBody>
       </p:sp>
-      <mc:AlternateContent xmlns:mc="http://schemas.openxmlformats.org/markup-compatibility/2006">
-        <mc:Choice xmlns:a14="http://schemas.microsoft.com/office/drawing/2010/main" Requires="a14">
+      <mc:AlternateContent xmlns:mc="http://schemas.openxmlformats.org/markup-compatibility/2006" xmlns:a14="http://schemas.microsoft.com/office/drawing/2010/main">
+        <mc:Choice Requires="a14">
           <p:sp>
             <p:nvSpPr>
               <p:cNvPr id="9" name="Rectangle 8">
@@ -28679,7 +28707,7 @@
                       <m:sSub>
                         <m:sSubPr>
                           <m:ctrlPr>
-                            <a:rPr lang="en-GB" sz="1600" b="0">
+                            <a:rPr lang="en-GB" sz="1600" b="0" i="1">
                               <a:solidFill>
                                 <a:srgbClr val="3A3A3A"/>
                               </a:solidFill>
@@ -28925,7 +28953,7 @@
             </p:txBody>
           </p:sp>
         </mc:Choice>
-        <mc:Fallback>
+        <mc:Fallback xmlns="">
           <p:sp>
             <p:nvSpPr>
               <p:cNvPr id="9" name="Rectangle 8">
@@ -29107,8 +29135,8 @@
           </a:p>
         </p:txBody>
       </p:sp>
-      <mc:AlternateContent xmlns:mc="http://schemas.openxmlformats.org/markup-compatibility/2006">
-        <mc:Choice xmlns:a14="http://schemas.microsoft.com/office/drawing/2010/main" Requires="a14">
+      <mc:AlternateContent xmlns:mc="http://schemas.openxmlformats.org/markup-compatibility/2006" xmlns:a14="http://schemas.microsoft.com/office/drawing/2010/main">
+        <mc:Choice Requires="a14">
           <p:sp>
             <p:nvSpPr>
               <p:cNvPr id="13" name="Rectangle 12">
@@ -29158,7 +29186,7 @@
                       <m:sSub>
                         <m:sSubPr>
                           <m:ctrlPr>
-                            <a:rPr lang="en-GB" sz="1600">
+                            <a:rPr lang="en-GB" sz="1600" i="1">
                               <a:solidFill>
                                 <a:srgbClr val="3A3A3A"/>
                               </a:solidFill>
@@ -29412,7 +29440,7 @@
             </p:txBody>
           </p:sp>
         </mc:Choice>
-        <mc:Fallback>
+        <mc:Fallback xmlns="">
           <p:sp>
             <p:nvSpPr>
               <p:cNvPr id="13" name="Rectangle 12">
@@ -29537,8 +29565,8 @@
               <a:buNone/>
             </a:pPr>
             <a:fld id="{FC0CB1EC-C7B0-4E93-850A-703E8C0817ED}" type="datetime1">
-              <a:rPr/>
-              <a:t>7/28/2026</a:t>
+              <a:rPr lang="en-US"/>
+              <a:t>7/29/2026</a:t>
             </a:fld>
             <a:endParaRPr/>
           </a:p>
@@ -30334,8 +30362,8 @@
               <a:buNone/>
             </a:pPr>
             <a:fld id="{A9603EBC-09BC-4B7A-B2AE-FCAA42D8479D}" type="datetime1">
-              <a:rPr/>
-              <a:t>7/28/2026</a:t>
+              <a:rPr lang="en-US"/>
+              <a:t>7/29/2026</a:t>
             </a:fld>
             <a:endParaRPr/>
           </a:p>
@@ -31538,8 +31566,8 @@
           </a:p>
         </p:txBody>
       </p:sp>
-      <mc:AlternateContent xmlns:mc="http://schemas.openxmlformats.org/markup-compatibility/2006">
-        <mc:Choice xmlns:a14="http://schemas.microsoft.com/office/drawing/2010/main" Requires="a14">
+      <mc:AlternateContent xmlns:mc="http://schemas.openxmlformats.org/markup-compatibility/2006" xmlns:a14="http://schemas.microsoft.com/office/drawing/2010/main">
+        <mc:Choice Requires="a14">
           <p:sp>
             <p:nvSpPr>
               <p:cNvPr id="23" name="TextBox 22">
@@ -31582,7 +31610,7 @@
                       <m:sSup>
                         <m:sSupPr>
                           <m:ctrlPr>
-                            <a:rPr lang="en-GB" sz="3200" b="1">
+                            <a:rPr lang="en-GB" sz="3200" b="1" i="1">
                               <a:solidFill>
                                 <a:schemeClr val="tx1"/>
                               </a:solidFill>
@@ -31627,7 +31655,7 @@
             </p:txBody>
           </p:sp>
         </mc:Choice>
-        <mc:Fallback>
+        <mc:Fallback xmlns="">
           <p:sp>
             <p:nvSpPr>
               <p:cNvPr id="23" name="TextBox 22">
@@ -31672,8 +31700,8 @@
           </p:sp>
         </mc:Fallback>
       </mc:AlternateContent>
-      <mc:AlternateContent xmlns:mc="http://schemas.openxmlformats.org/markup-compatibility/2006">
-        <mc:Choice xmlns:a14="http://schemas.microsoft.com/office/drawing/2010/main" Requires="a14">
+      <mc:AlternateContent xmlns:mc="http://schemas.openxmlformats.org/markup-compatibility/2006" xmlns:a14="http://schemas.microsoft.com/office/drawing/2010/main">
+        <mc:Choice Requires="a14">
           <p:sp>
             <p:nvSpPr>
               <p:cNvPr id="24" name="TextBox 23">
@@ -31716,7 +31744,7 @@
                       <m:sSup>
                         <m:sSupPr>
                           <m:ctrlPr>
-                            <a:rPr lang="en-GB" sz="3200" b="1">
+                            <a:rPr lang="en-GB" sz="3200" b="1" i="1">
                               <a:solidFill>
                                 <a:schemeClr val="tx1"/>
                               </a:solidFill>
@@ -31761,7 +31789,7 @@
             </p:txBody>
           </p:sp>
         </mc:Choice>
-        <mc:Fallback>
+        <mc:Fallback xmlns="">
           <p:sp>
             <p:nvSpPr>
               <p:cNvPr id="24" name="TextBox 23">
@@ -31806,8 +31834,8 @@
           </p:sp>
         </mc:Fallback>
       </mc:AlternateContent>
-      <mc:AlternateContent xmlns:mc="http://schemas.openxmlformats.org/markup-compatibility/2006">
-        <mc:Choice xmlns:a14="http://schemas.microsoft.com/office/drawing/2010/main" Requires="a14">
+      <mc:AlternateContent xmlns:mc="http://schemas.openxmlformats.org/markup-compatibility/2006" xmlns:a14="http://schemas.microsoft.com/office/drawing/2010/main">
+        <mc:Choice Requires="a14">
           <p:sp>
             <p:nvSpPr>
               <p:cNvPr id="25" name="TextBox 24">
@@ -31850,7 +31878,7 @@
                       <m:sSup>
                         <m:sSupPr>
                           <m:ctrlPr>
-                            <a:rPr lang="en-GB" sz="3200" b="1">
+                            <a:rPr lang="en-GB" sz="3200" b="1" i="1">
                               <a:solidFill>
                                 <a:schemeClr val="tx1"/>
                               </a:solidFill>
@@ -31895,7 +31923,7 @@
             </p:txBody>
           </p:sp>
         </mc:Choice>
-        <mc:Fallback>
+        <mc:Fallback xmlns="">
           <p:sp>
             <p:nvSpPr>
               <p:cNvPr id="25" name="TextBox 24">
@@ -31940,8 +31968,8 @@
           </p:sp>
         </mc:Fallback>
       </mc:AlternateContent>
-      <mc:AlternateContent xmlns:mc="http://schemas.openxmlformats.org/markup-compatibility/2006">
-        <mc:Choice xmlns:a14="http://schemas.microsoft.com/office/drawing/2010/main" Requires="a14">
+      <mc:AlternateContent xmlns:mc="http://schemas.openxmlformats.org/markup-compatibility/2006" xmlns:a14="http://schemas.microsoft.com/office/drawing/2010/main">
+        <mc:Choice Requires="a14">
           <p:sp>
             <p:nvSpPr>
               <p:cNvPr id="26" name="TextBox 25">
@@ -31984,7 +32012,7 @@
                       <m:sSup>
                         <m:sSupPr>
                           <m:ctrlPr>
-                            <a:rPr lang="en-GB" sz="3200" b="1">
+                            <a:rPr lang="en-GB" sz="3200" b="1" i="1">
                               <a:solidFill>
                                 <a:schemeClr val="tx1"/>
                               </a:solidFill>
@@ -32029,7 +32057,7 @@
             </p:txBody>
           </p:sp>
         </mc:Choice>
-        <mc:Fallback>
+        <mc:Fallback xmlns="">
           <p:sp>
             <p:nvSpPr>
               <p:cNvPr id="26" name="TextBox 25">
@@ -32074,8 +32102,8 @@
           </p:sp>
         </mc:Fallback>
       </mc:AlternateContent>
-      <mc:AlternateContent xmlns:mc="http://schemas.openxmlformats.org/markup-compatibility/2006">
-        <mc:Choice xmlns:a14="http://schemas.microsoft.com/office/drawing/2010/main" Requires="a14">
+      <mc:AlternateContent xmlns:mc="http://schemas.openxmlformats.org/markup-compatibility/2006" xmlns:a14="http://schemas.microsoft.com/office/drawing/2010/main">
+        <mc:Choice Requires="a14">
           <p:sp>
             <p:nvSpPr>
               <p:cNvPr id="27" name="TextBox 26">
@@ -32118,7 +32146,7 @@
                       <m:sSup>
                         <m:sSupPr>
                           <m:ctrlPr>
-                            <a:rPr lang="en-GB" sz="3200" b="1">
+                            <a:rPr lang="en-GB" sz="3200" b="1" i="1">
                               <a:solidFill>
                                 <a:schemeClr val="tx1"/>
                               </a:solidFill>
@@ -32163,7 +32191,7 @@
             </p:txBody>
           </p:sp>
         </mc:Choice>
-        <mc:Fallback>
+        <mc:Fallback xmlns="">
           <p:sp>
             <p:nvSpPr>
               <p:cNvPr id="27" name="TextBox 26">
@@ -32208,8 +32236,8 @@
           </p:sp>
         </mc:Fallback>
       </mc:AlternateContent>
-      <mc:AlternateContent xmlns:mc="http://schemas.openxmlformats.org/markup-compatibility/2006">
-        <mc:Choice xmlns:a14="http://schemas.microsoft.com/office/drawing/2010/main" Requires="a14">
+      <mc:AlternateContent xmlns:mc="http://schemas.openxmlformats.org/markup-compatibility/2006" xmlns:a14="http://schemas.microsoft.com/office/drawing/2010/main">
+        <mc:Choice Requires="a14">
           <p:sp>
             <p:nvSpPr>
               <p:cNvPr id="28" name="TextBox 27">
@@ -32252,7 +32280,7 @@
                       <m:sSup>
                         <m:sSupPr>
                           <m:ctrlPr>
-                            <a:rPr lang="en-GB" sz="3200" b="1">
+                            <a:rPr lang="en-GB" sz="3200" b="1" i="1">
                               <a:solidFill>
                                 <a:schemeClr val="tx1"/>
                               </a:solidFill>
@@ -32297,7 +32325,7 @@
             </p:txBody>
           </p:sp>
         </mc:Choice>
-        <mc:Fallback>
+        <mc:Fallback xmlns="">
           <p:sp>
             <p:nvSpPr>
               <p:cNvPr id="28" name="TextBox 27">
@@ -32342,8 +32370,8 @@
           </p:sp>
         </mc:Fallback>
       </mc:AlternateContent>
-      <mc:AlternateContent xmlns:mc="http://schemas.openxmlformats.org/markup-compatibility/2006">
-        <mc:Choice xmlns:a14="http://schemas.microsoft.com/office/drawing/2010/main" Requires="a14">
+      <mc:AlternateContent xmlns:mc="http://schemas.openxmlformats.org/markup-compatibility/2006" xmlns:a14="http://schemas.microsoft.com/office/drawing/2010/main">
+        <mc:Choice Requires="a14">
           <p:sp>
             <p:nvSpPr>
               <p:cNvPr id="29" name="TextBox 28">
@@ -32386,7 +32414,7 @@
                       <m:sSup>
                         <m:sSupPr>
                           <m:ctrlPr>
-                            <a:rPr lang="en-GB" sz="3200" b="1">
+                            <a:rPr lang="en-GB" sz="3200" b="1" i="1">
                               <a:solidFill>
                                 <a:schemeClr val="tx1"/>
                               </a:solidFill>
@@ -32431,7 +32459,7 @@
             </p:txBody>
           </p:sp>
         </mc:Choice>
-        <mc:Fallback>
+        <mc:Fallback xmlns="">
           <p:sp>
             <p:nvSpPr>
               <p:cNvPr id="29" name="TextBox 28">
@@ -32476,8 +32504,8 @@
           </p:sp>
         </mc:Fallback>
       </mc:AlternateContent>
-      <mc:AlternateContent xmlns:mc="http://schemas.openxmlformats.org/markup-compatibility/2006">
-        <mc:Choice xmlns:a14="http://schemas.microsoft.com/office/drawing/2010/main" Requires="a14">
+      <mc:AlternateContent xmlns:mc="http://schemas.openxmlformats.org/markup-compatibility/2006" xmlns:a14="http://schemas.microsoft.com/office/drawing/2010/main">
+        <mc:Choice Requires="a14">
           <p:sp>
             <p:nvSpPr>
               <p:cNvPr id="30" name="TextBox 29">
@@ -32520,7 +32548,7 @@
                       <m:sSup>
                         <m:sSupPr>
                           <m:ctrlPr>
-                            <a:rPr lang="en-GB" sz="3200" b="1">
+                            <a:rPr lang="en-GB" sz="3200" b="1" i="1">
                               <a:solidFill>
                                 <a:schemeClr val="tx1"/>
                               </a:solidFill>
@@ -32565,7 +32593,7 @@
             </p:txBody>
           </p:sp>
         </mc:Choice>
-        <mc:Fallback>
+        <mc:Fallback xmlns="">
           <p:sp>
             <p:nvSpPr>
               <p:cNvPr id="30" name="TextBox 29">
@@ -32610,8 +32638,8 @@
           </p:sp>
         </mc:Fallback>
       </mc:AlternateContent>
-      <mc:AlternateContent xmlns:mc="http://schemas.openxmlformats.org/markup-compatibility/2006">
-        <mc:Choice xmlns:a14="http://schemas.microsoft.com/office/drawing/2010/main" Requires="a14">
+      <mc:AlternateContent xmlns:mc="http://schemas.openxmlformats.org/markup-compatibility/2006" xmlns:a14="http://schemas.microsoft.com/office/drawing/2010/main">
+        <mc:Choice Requires="a14">
           <p:sp>
             <p:nvSpPr>
               <p:cNvPr id="31" name="TextBox 30">
@@ -32654,7 +32682,7 @@
                       <m:sSup>
                         <m:sSupPr>
                           <m:ctrlPr>
-                            <a:rPr lang="en-GB" sz="3200" b="1">
+                            <a:rPr lang="en-GB" sz="3200" b="1" i="1">
                               <a:solidFill>
                                 <a:schemeClr val="tx1"/>
                               </a:solidFill>
@@ -32699,7 +32727,7 @@
             </p:txBody>
           </p:sp>
         </mc:Choice>
-        <mc:Fallback>
+        <mc:Fallback xmlns="">
           <p:sp>
             <p:nvSpPr>
               <p:cNvPr id="31" name="TextBox 30">
@@ -32744,8 +32772,8 @@
           </p:sp>
         </mc:Fallback>
       </mc:AlternateContent>
-      <mc:AlternateContent xmlns:mc="http://schemas.openxmlformats.org/markup-compatibility/2006">
-        <mc:Choice xmlns:a14="http://schemas.microsoft.com/office/drawing/2010/main" Requires="a14">
+      <mc:AlternateContent xmlns:mc="http://schemas.openxmlformats.org/markup-compatibility/2006" xmlns:a14="http://schemas.microsoft.com/office/drawing/2010/main">
+        <mc:Choice Requires="a14">
           <p:sp>
             <p:nvSpPr>
               <p:cNvPr id="32" name="TextBox 31">
@@ -32788,7 +32816,7 @@
                       <m:sSup>
                         <m:sSupPr>
                           <m:ctrlPr>
-                            <a:rPr lang="en-GB" sz="3200" b="1">
+                            <a:rPr lang="en-GB" sz="3200" b="1" i="1">
                               <a:solidFill>
                                 <a:schemeClr val="tx1"/>
                               </a:solidFill>
@@ -32833,7 +32861,7 @@
             </p:txBody>
           </p:sp>
         </mc:Choice>
-        <mc:Fallback>
+        <mc:Fallback xmlns="">
           <p:sp>
             <p:nvSpPr>
               <p:cNvPr id="32" name="TextBox 31">
@@ -32878,8 +32906,8 @@
           </p:sp>
         </mc:Fallback>
       </mc:AlternateContent>
-      <mc:AlternateContent xmlns:mc="http://schemas.openxmlformats.org/markup-compatibility/2006">
-        <mc:Choice xmlns:a14="http://schemas.microsoft.com/office/drawing/2010/main" Requires="a14">
+      <mc:AlternateContent xmlns:mc="http://schemas.openxmlformats.org/markup-compatibility/2006" xmlns:a14="http://schemas.microsoft.com/office/drawing/2010/main">
+        <mc:Choice Requires="a14">
           <p:sp>
             <p:nvSpPr>
               <p:cNvPr id="33" name="TextBox 32">
@@ -32922,7 +32950,7 @@
                       <m:sSup>
                         <m:sSupPr>
                           <m:ctrlPr>
-                            <a:rPr lang="en-GB" sz="3200" b="1">
+                            <a:rPr lang="en-GB" sz="3200" b="1" i="1">
                               <a:solidFill>
                                 <a:schemeClr val="tx1"/>
                               </a:solidFill>
@@ -32967,7 +32995,7 @@
             </p:txBody>
           </p:sp>
         </mc:Choice>
-        <mc:Fallback>
+        <mc:Fallback xmlns="">
           <p:sp>
             <p:nvSpPr>
               <p:cNvPr id="33" name="TextBox 32">
@@ -33012,8 +33040,8 @@
           </p:sp>
         </mc:Fallback>
       </mc:AlternateContent>
-      <mc:AlternateContent xmlns:mc="http://schemas.openxmlformats.org/markup-compatibility/2006">
-        <mc:Choice xmlns:a14="http://schemas.microsoft.com/office/drawing/2010/main" Requires="a14">
+      <mc:AlternateContent xmlns:mc="http://schemas.openxmlformats.org/markup-compatibility/2006" xmlns:a14="http://schemas.microsoft.com/office/drawing/2010/main">
+        <mc:Choice Requires="a14">
           <p:sp>
             <p:nvSpPr>
               <p:cNvPr id="34" name="TextBox 33">
@@ -33056,7 +33084,7 @@
                       <m:sSup>
                         <m:sSupPr>
                           <m:ctrlPr>
-                            <a:rPr lang="en-GB" sz="3200" b="1">
+                            <a:rPr lang="en-GB" sz="3200" b="1" i="1">
                               <a:solidFill>
                                 <a:schemeClr val="tx1"/>
                               </a:solidFill>
@@ -33101,7 +33129,7 @@
             </p:txBody>
           </p:sp>
         </mc:Choice>
-        <mc:Fallback>
+        <mc:Fallback xmlns="">
           <p:sp>
             <p:nvSpPr>
               <p:cNvPr id="34" name="TextBox 33">
@@ -33146,8 +33174,8 @@
           </p:sp>
         </mc:Fallback>
       </mc:AlternateContent>
-      <mc:AlternateContent xmlns:mc="http://schemas.openxmlformats.org/markup-compatibility/2006">
-        <mc:Choice xmlns:a14="http://schemas.microsoft.com/office/drawing/2010/main" Requires="a14">
+      <mc:AlternateContent xmlns:mc="http://schemas.openxmlformats.org/markup-compatibility/2006" xmlns:a14="http://schemas.microsoft.com/office/drawing/2010/main">
+        <mc:Choice Requires="a14">
           <p:sp>
             <p:nvSpPr>
               <p:cNvPr id="35" name="TextBox 34">
@@ -33178,7 +33206,6 @@
               </a:bodyPr>
               <a:lstStyle/>
               <a:p>
-                <a:pPr/>
                 <a:r>
                   <a:rPr sz="3200" b="1">
                     <a:solidFill>
@@ -33214,7 +33241,7 @@
             </p:txBody>
           </p:sp>
         </mc:Choice>
-        <mc:Fallback>
+        <mc:Fallback xmlns="">
           <p:sp>
             <p:nvSpPr>
               <p:cNvPr id="35" name="TextBox 34">
@@ -33259,8 +33286,8 @@
           </p:sp>
         </mc:Fallback>
       </mc:AlternateContent>
-      <mc:AlternateContent xmlns:mc="http://schemas.openxmlformats.org/markup-compatibility/2006">
-        <mc:Choice xmlns:a14="http://schemas.microsoft.com/office/drawing/2010/main" Requires="a14">
+      <mc:AlternateContent xmlns:mc="http://schemas.openxmlformats.org/markup-compatibility/2006" xmlns:a14="http://schemas.microsoft.com/office/drawing/2010/main">
+        <mc:Choice Requires="a14">
           <p:sp>
             <p:nvSpPr>
               <p:cNvPr id="36" name="TextBox 35">
@@ -33317,7 +33344,7 @@
                       <m:sSup>
                         <m:sSupPr>
                           <m:ctrlPr>
-                            <a:rPr lang="en-GB" sz="3200" b="1">
+                            <a:rPr lang="en-GB" sz="3200" b="1" i="1">
                               <a:solidFill>
                                 <a:schemeClr val="tx1"/>
                               </a:solidFill>
@@ -33453,7 +33480,7 @@
             </p:txBody>
           </p:sp>
         </mc:Choice>
-        <mc:Fallback>
+        <mc:Fallback xmlns="">
           <p:sp>
             <p:nvSpPr>
               <p:cNvPr id="36" name="TextBox 35">
@@ -33925,8 +33952,8 @@
               <a:buNone/>
             </a:pPr>
             <a:fld id="{6FBAB905-F404-45C9-B63D-F093A68E4E6E}" type="datetime1">
-              <a:rPr/>
-              <a:t>7/28/2026</a:t>
+              <a:rPr lang="en-US"/>
+              <a:t>7/29/2026</a:t>
             </a:fld>
             <a:endParaRPr/>
           </a:p>
@@ -34162,8 +34189,8 @@
               <a:buNone/>
             </a:pPr>
             <a:fld id="{65B4684A-4844-489E-BF1D-40BD4110DA98}" type="datetime1">
-              <a:rPr/>
-              <a:t>7/28/2026</a:t>
+              <a:rPr lang="en-US"/>
+              <a:t>7/29/2026</a:t>
             </a:fld>
             <a:endParaRPr/>
           </a:p>
@@ -35313,8 +35340,8 @@
               <a:buNone/>
             </a:pPr>
             <a:fld id="{6411DBE6-18B3-4EA1-8E42-5FDED875F857}" type="datetime1">
-              <a:rPr/>
-              <a:t>7/28/2026</a:t>
+              <a:rPr lang="en-US"/>
+              <a:t>7/29/2026</a:t>
             </a:fld>
             <a:endParaRPr/>
           </a:p>
@@ -35481,8 +35508,8 @@
           </a:prstGeom>
         </p:spPr>
       </p:pic>
-      <mc:AlternateContent xmlns:mc="http://schemas.openxmlformats.org/markup-compatibility/2006">
-        <mc:Choice xmlns:a14="http://schemas.microsoft.com/office/drawing/2010/main" Requires="a14">
+      <mc:AlternateContent xmlns:mc="http://schemas.openxmlformats.org/markup-compatibility/2006" xmlns:a14="http://schemas.microsoft.com/office/drawing/2010/main">
+        <mc:Choice Requires="a14">
           <p:sp>
             <p:nvSpPr>
               <p:cNvPr id="6" name="TextBox 5">
@@ -35525,7 +35552,7 @@
                       <m:sSub>
                         <m:sSubPr>
                           <m:ctrlPr>
-                            <a:rPr lang="en-GB" sz="2400" b="0">
+                            <a:rPr lang="en-GB" sz="2400" b="0" i="1">
                               <a:latin typeface="Cambria Math" panose="02040503050406030204" pitchFamily="18" charset="0"/>
                               <a:ea typeface="Cambria Math"/>
                               <a:cs typeface="Cambria Math"/>
@@ -35756,7 +35783,7 @@
             </p:txBody>
           </p:sp>
         </mc:Choice>
-        <mc:Fallback>
+        <mc:Fallback xmlns="">
           <p:sp>
             <p:nvSpPr>
               <p:cNvPr id="6" name="TextBox 5">
@@ -35826,8 +35853,8 @@
               <a:buNone/>
             </a:pPr>
             <a:fld id="{B0F98BE3-F5DE-40E7-9BB9-7BA78539E7F4}" type="datetime1">
-              <a:rPr/>
-              <a:t>7/28/2026</a:t>
+              <a:rPr lang="en-US"/>
+              <a:t>7/29/2026</a:t>
             </a:fld>
             <a:endParaRPr/>
           </a:p>
@@ -36047,7 +36074,7 @@
         </p:nvSpPr>
         <p:spPr>
           <a:xfrm>
-            <a:off x="800100" y="1809750"/>
+            <a:off x="800100" y="1398566"/>
             <a:ext cx="3190875" cy="2249632"/>
           </a:xfrm>
           <a:prstGeom prst="roundRect">
@@ -36089,7 +36116,7 @@
         </p:nvSpPr>
         <p:spPr>
           <a:xfrm>
-            <a:off x="971550" y="1981200"/>
+            <a:off x="971550" y="1570016"/>
             <a:ext cx="800100" cy="38100"/>
           </a:xfrm>
           <a:prstGeom prst="rect">
@@ -36129,7 +36156,7 @@
         </p:nvSpPr>
         <p:spPr>
           <a:xfrm>
-            <a:off x="971550" y="2209800"/>
+            <a:off x="971550" y="1798616"/>
             <a:ext cx="2847975" cy="400050"/>
           </a:xfrm>
           <a:prstGeom prst="rect">
@@ -36180,7 +36207,7 @@
         </p:nvSpPr>
         <p:spPr>
           <a:xfrm>
-            <a:off x="971550" y="2686050"/>
+            <a:off x="971550" y="2274866"/>
             <a:ext cx="2847975" cy="1924050"/>
           </a:xfrm>
           <a:prstGeom prst="rect">
@@ -36285,7 +36312,7 @@
         </p:nvSpPr>
         <p:spPr>
           <a:xfrm>
-            <a:off x="4495800" y="1809750"/>
+            <a:off x="4495800" y="1398566"/>
             <a:ext cx="3190875" cy="2249632"/>
           </a:xfrm>
           <a:prstGeom prst="roundRect">
@@ -36327,7 +36354,7 @@
         </p:nvSpPr>
         <p:spPr>
           <a:xfrm>
-            <a:off x="4667250" y="1981200"/>
+            <a:off x="4667250" y="1570016"/>
             <a:ext cx="800100" cy="38100"/>
           </a:xfrm>
           <a:prstGeom prst="rect">
@@ -36367,7 +36394,7 @@
         </p:nvSpPr>
         <p:spPr>
           <a:xfrm>
-            <a:off x="4667250" y="2209800"/>
+            <a:off x="4667250" y="1798616"/>
             <a:ext cx="2847975" cy="400050"/>
           </a:xfrm>
           <a:prstGeom prst="rect">
@@ -36418,7 +36445,7 @@
         </p:nvSpPr>
         <p:spPr>
           <a:xfrm>
-            <a:off x="4667250" y="2686050"/>
+            <a:off x="4667250" y="2274866"/>
             <a:ext cx="2847975" cy="1924050"/>
           </a:xfrm>
           <a:prstGeom prst="rect">
@@ -36523,7 +36550,7 @@
         </p:nvSpPr>
         <p:spPr>
           <a:xfrm>
-            <a:off x="8191500" y="1809750"/>
+            <a:off x="8191500" y="1398566"/>
             <a:ext cx="3190875" cy="2249632"/>
           </a:xfrm>
           <a:prstGeom prst="roundRect">
@@ -36565,7 +36592,7 @@
         </p:nvSpPr>
         <p:spPr>
           <a:xfrm>
-            <a:off x="8362950" y="1981200"/>
+            <a:off x="8362950" y="1570016"/>
             <a:ext cx="800100" cy="38100"/>
           </a:xfrm>
           <a:prstGeom prst="rect">
@@ -36605,7 +36632,7 @@
         </p:nvSpPr>
         <p:spPr>
           <a:xfrm>
-            <a:off x="8362950" y="2209800"/>
+            <a:off x="8362950" y="1798616"/>
             <a:ext cx="2847975" cy="400050"/>
           </a:xfrm>
           <a:prstGeom prst="rect">
@@ -36656,7 +36683,7 @@
         </p:nvSpPr>
         <p:spPr>
           <a:xfrm>
-            <a:off x="8362950" y="2686050"/>
+            <a:off x="8362950" y="2274866"/>
             <a:ext cx="2847975" cy="1924050"/>
           </a:xfrm>
           <a:prstGeom prst="rect">
@@ -36770,8 +36797,8 @@
               <a:buNone/>
             </a:pPr>
             <a:fld id="{176AADD8-090D-41B4-82C6-8DFFCB413092}" type="datetime1">
-              <a:rPr/>
-              <a:t>7/28/2026</a:t>
+              <a:rPr lang="en-US"/>
+              <a:t>7/29/2026</a:t>
             </a:fld>
             <a:endParaRPr/>
           </a:p>
@@ -36805,7 +36832,7 @@
               <a:rPr/>
               <a:t>2</a:t>
             </a:fld>
-            <a:endParaRPr/>
+            <a:endParaRPr dirty="0"/>
           </a:p>
         </p:txBody>
       </p:sp>
@@ -36823,7 +36850,7 @@
         </p:nvSpPr>
         <p:spPr>
           <a:xfrm>
-            <a:off x="1097270" y="4445153"/>
+            <a:off x="1097270" y="4033969"/>
             <a:ext cx="1871987" cy="1754326"/>
           </a:xfrm>
           <a:prstGeom prst="rect">
@@ -36879,7 +36906,7 @@
         </p:nvSpPr>
         <p:spPr>
           <a:xfrm>
-            <a:off x="4457701" y="4352820"/>
+            <a:off x="4457701" y="3941636"/>
             <a:ext cx="3228974" cy="1754326"/>
           </a:xfrm>
           <a:prstGeom prst="rect">
@@ -36895,7 +36922,7 @@
           <a:p>
             <a:r>
               <a:rPr lang="en-GB" dirty="0"/>
-              <a:t>~30 mins</a:t>
+              <a:t>~35 mins</a:t>
             </a:r>
           </a:p>
           <a:p>
@@ -36913,7 +36940,7 @@
           <a:p>
             <a:r>
               <a:rPr lang="en-GB" dirty="0"/>
-              <a:t>Practical: load &amp; generate</a:t>
+              <a:t>Break</a:t>
             </a:r>
           </a:p>
           <a:p>
@@ -36935,8 +36962,8 @@
         </p:nvSpPr>
         <p:spPr>
           <a:xfrm>
-            <a:off x="8153401" y="4352820"/>
-            <a:ext cx="3200400" cy="1754326"/>
+            <a:off x="8153401" y="3941636"/>
+            <a:ext cx="3200400" cy="1477328"/>
           </a:xfrm>
           <a:prstGeom prst="rect">
             <a:avLst/>
@@ -36969,8 +36996,72 @@
           <a:p>
             <a:r>
               <a:rPr lang="en-GB" dirty="0"/>
-              <a:t>Practical: finetuning &amp; conditioning</a:t>
-            </a:r>
+              <a:t>Break</a:t>
+            </a:r>
+          </a:p>
+        </p:txBody>
+      </p:sp>
+      <p:sp>
+        <p:nvSpPr>
+          <p:cNvPr id="21" name="TextBox 20">
+            <a:extLst>
+              <a:ext uri="{FF2B5EF4-FFF2-40B4-BE49-F238E27FC236}">
+                <a16:creationId xmlns:a16="http://schemas.microsoft.com/office/drawing/2014/main" id="{9C8666DD-AC7F-9B03-33EE-26F7B383C8FF}"/>
+              </a:ext>
+            </a:extLst>
+          </p:cNvPr>
+          <p:cNvSpPr txBox="1"/>
+          <p:nvPr/>
+        </p:nvSpPr>
+        <p:spPr>
+          <a:xfrm>
+            <a:off x="1097270" y="5712402"/>
+            <a:ext cx="9240982" cy="369332"/>
+          </a:xfrm>
+          <a:prstGeom prst="rect">
+            <a:avLst/>
+          </a:prstGeom>
+          <a:noFill/>
+        </p:spPr>
+        <p:txBody>
+          <a:bodyPr wrap="square">
+            <a:spAutoFit/>
+          </a:bodyPr>
+          <a:lstStyle/>
+          <a:p>
+            <a:r>
+              <a:rPr lang="en-GB" sz="1800" dirty="0"/>
+              <a:t>Practical notebooks: </a:t>
+            </a:r>
+            <a:r>
+              <a:rPr lang="en-GB" sz="1800" dirty="0" err="1"/>
+              <a:t>load_and</a:t>
+            </a:r>
+            <a:r>
+              <a:rPr lang="en-GB" sz="1800" dirty="0"/>
+              <a:t> </a:t>
+            </a:r>
+            <a:r>
+              <a:rPr lang="en-GB" sz="1800" dirty="0" err="1"/>
+              <a:t>generate.ipynb</a:t>
+            </a:r>
+            <a:r>
+              <a:rPr lang="en-GB" sz="1800" dirty="0"/>
+              <a:t> and </a:t>
+            </a:r>
+            <a:r>
+              <a:rPr lang="en-GB" sz="1800" dirty="0" err="1"/>
+              <a:t>Z_finetune_and</a:t>
+            </a:r>
+            <a:r>
+              <a:rPr lang="en-GB" sz="1800" dirty="0"/>
+              <a:t> </a:t>
+            </a:r>
+            <a:r>
+              <a:rPr lang="en-GB" sz="1800" dirty="0" err="1"/>
+              <a:t>conditioning.ipynb</a:t>
+            </a:r>
+            <a:endParaRPr lang="en-GB" sz="1800" dirty="0"/>
           </a:p>
         </p:txBody>
       </p:sp>
@@ -37242,8 +37333,8 @@
               <a:buNone/>
             </a:pPr>
             <a:fld id="{BDB6C309-0D5A-41CB-A76C-1AC840F841E7}" type="datetime1">
-              <a:rPr/>
-              <a:t>7/28/2026</a:t>
+              <a:rPr lang="en-US"/>
+              <a:t>7/29/2026</a:t>
             </a:fld>
             <a:endParaRPr/>
           </a:p>
@@ -38020,8 +38111,8 @@
               <a:buNone/>
             </a:pPr>
             <a:fld id="{190AEA20-CA62-473E-A5FE-CC7BD15581AC}" type="datetime1">
-              <a:rPr/>
-              <a:t>7/28/2026</a:t>
+              <a:rPr lang="en-US"/>
+              <a:t>7/29/2026</a:t>
             </a:fld>
             <a:endParaRPr/>
           </a:p>
@@ -38394,8 +38485,8 @@
               <a:buNone/>
             </a:pPr>
             <a:fld id="{03D5F414-5D8B-4FB4-A1FA-C4C3DF6AB4B2}" type="datetime1">
-              <a:rPr/>
-              <a:t>7/28/2026</a:t>
+              <a:rPr lang="en-US"/>
+              <a:t>7/29/2026</a:t>
             </a:fld>
             <a:endParaRPr/>
           </a:p>
@@ -39121,8 +39212,8 @@
               <a:buNone/>
             </a:pPr>
             <a:fld id="{4B78BFC5-E39F-448F-8587-883C8905F956}" type="datetime1">
-              <a:rPr/>
-              <a:t>7/28/2026</a:t>
+              <a:rPr lang="en-US"/>
+              <a:t>7/29/2026</a:t>
             </a:fld>
             <a:endParaRPr/>
           </a:p>
@@ -39444,8 +39535,8 @@
               <a:buNone/>
             </a:pPr>
             <a:fld id="{66B437F6-510D-4C82-A7B4-EBA2803BDBFD}" type="datetime1">
-              <a:rPr/>
-              <a:t>7/28/2026</a:t>
+              <a:rPr lang="en-US"/>
+              <a:t>7/29/2026</a:t>
             </a:fld>
             <a:endParaRPr/>
           </a:p>
@@ -40384,8 +40475,8 @@
               <a:buNone/>
             </a:pPr>
             <a:fld id="{BD464C9E-5CAD-45C1-81A1-3D3EEAFEA820}" type="datetime1">
-              <a:rPr/>
-              <a:t>7/28/2026</a:t>
+              <a:rPr lang="en-US"/>
+              <a:t>7/29/2026</a:t>
             </a:fld>
             <a:endParaRPr/>
           </a:p>
@@ -41045,8 +41136,8 @@
               <a:buNone/>
             </a:pPr>
             <a:fld id="{40A07D1A-8763-4068-888D-79BF937C15B6}" type="datetime1">
-              <a:rPr/>
-              <a:t>7/28/2026</a:t>
+              <a:rPr lang="en-US"/>
+              <a:t>7/29/2026</a:t>
             </a:fld>
             <a:endParaRPr/>
           </a:p>
@@ -41823,8 +41914,8 @@
               <a:buNone/>
             </a:pPr>
             <a:fld id="{AB4781CF-1719-4B7C-BCCD-DFC5A19F596F}" type="datetime1">
-              <a:rPr/>
-              <a:t>7/28/2026</a:t>
+              <a:rPr lang="en-US"/>
+              <a:t>7/29/2026</a:t>
             </a:fld>
             <a:endParaRPr/>
           </a:p>
@@ -42088,8 +42179,8 @@
               <a:buNone/>
             </a:pPr>
             <a:fld id="{FFCD5246-9FB4-4C43-8A73-05ED744C8A64}" type="datetime1">
-              <a:rPr/>
-              <a:t>7/28/2026</a:t>
+              <a:rPr lang="en-US"/>
+              <a:t>7/29/2026</a:t>
             </a:fld>
             <a:endParaRPr/>
           </a:p>
@@ -42824,8 +42915,8 @@
               <a:buNone/>
             </a:pPr>
             <a:fld id="{F29A6FD7-8742-4C1B-819B-CC463A278635}" type="datetime1">
-              <a:rPr/>
-              <a:t>7/28/2026</a:t>
+              <a:rPr lang="en-US"/>
+              <a:t>7/29/2026</a:t>
             </a:fld>
             <a:endParaRPr/>
           </a:p>
@@ -43090,15 +43181,15 @@
         </p:nvPicPr>
         <p:blipFill>
           <a:blip r:embed="rId3"/>
-          <a:srcRect b="88808"/>
+          <a:srcRect r="62192" b="88792"/>
           <a:stretch>
             <a:fillRect/>
           </a:stretch>
         </p:blipFill>
         <p:spPr>
           <a:xfrm>
-            <a:off x="547360" y="2272654"/>
-            <a:ext cx="8409709" cy="400110"/>
+            <a:off x="547360" y="1580520"/>
+            <a:ext cx="3179513" cy="400680"/>
           </a:xfrm>
           <a:prstGeom prst="rect">
             <a:avLst/>
@@ -43119,7 +43210,7 @@
         </p:nvSpPr>
         <p:spPr>
           <a:xfrm>
-            <a:off x="547360" y="3101104"/>
+            <a:off x="547360" y="2408970"/>
             <a:ext cx="4398713" cy="707886"/>
           </a:xfrm>
           <a:prstGeom prst="rect">
@@ -43167,8 +43258,69 @@
         </p:blipFill>
         <p:spPr>
           <a:xfrm>
-            <a:off x="5500360" y="1580520"/>
+            <a:off x="5500360" y="2134702"/>
             <a:ext cx="6220480" cy="3696959"/>
+          </a:xfrm>
+          <a:prstGeom prst="rect">
+            <a:avLst/>
+          </a:prstGeom>
+        </p:spPr>
+      </p:pic>
+      <p:pic>
+        <p:nvPicPr>
+          <p:cNvPr id="7" name="Picture 6">
+            <a:extLst>
+              <a:ext uri="{FF2B5EF4-FFF2-40B4-BE49-F238E27FC236}">
+                <a16:creationId xmlns:a16="http://schemas.microsoft.com/office/drawing/2014/main" id="{2B1EB2A5-1116-4523-63B8-F95748262D8F}"/>
+              </a:ext>
+            </a:extLst>
+          </p:cNvPr>
+          <p:cNvPicPr>
+            <a:picLocks noChangeAspect="1"/>
+          </p:cNvPicPr>
+          <p:nvPr/>
+        </p:nvPicPr>
+        <p:blipFill>
+          <a:blip r:embed="rId5"/>
+          <a:stretch>
+            <a:fillRect/>
+          </a:stretch>
+        </p:blipFill>
+        <p:spPr>
+          <a:xfrm>
+            <a:off x="547360" y="3741145"/>
+            <a:ext cx="4398713" cy="1908078"/>
+          </a:xfrm>
+          <a:prstGeom prst="rect">
+            <a:avLst/>
+          </a:prstGeom>
+        </p:spPr>
+      </p:pic>
+      <p:pic>
+        <p:nvPicPr>
+          <p:cNvPr id="11" name="Picture 10">
+            <a:extLst>
+              <a:ext uri="{FF2B5EF4-FFF2-40B4-BE49-F238E27FC236}">
+                <a16:creationId xmlns:a16="http://schemas.microsoft.com/office/drawing/2014/main" id="{C073EB5F-D298-B2F7-69A6-AB0F0342C0FE}"/>
+              </a:ext>
+            </a:extLst>
+          </p:cNvPr>
+          <p:cNvPicPr>
+            <a:picLocks noChangeAspect="1"/>
+          </p:cNvPicPr>
+          <p:nvPr/>
+        </p:nvPicPr>
+        <p:blipFill>
+          <a:blip r:embed="rId6"/>
+          <a:srcRect t="4974" r="4485"/>
+          <a:stretch>
+            <a:fillRect/>
+          </a:stretch>
+        </p:blipFill>
+        <p:spPr>
+          <a:xfrm>
+            <a:off x="8354185" y="1286946"/>
+            <a:ext cx="3366655" cy="5069404"/>
           </a:xfrm>
           <a:prstGeom prst="rect">
             <a:avLst/>
@@ -43185,6 +43337,81 @@
   <p:clrMapOvr>
     <a:masterClrMapping/>
   </p:clrMapOvr>
+  <p:timing>
+    <p:tnLst>
+      <p:par>
+        <p:cTn id="1" dur="indefinite" restart="never" nodeType="tmRoot">
+          <p:childTnLst>
+            <p:seq concurrent="1" nextAc="seek">
+              <p:cTn id="2" dur="indefinite" nodeType="mainSeq">
+                <p:childTnLst>
+                  <p:par>
+                    <p:cTn id="3" fill="hold">
+                      <p:stCondLst>
+                        <p:cond delay="indefinite"/>
+                      </p:stCondLst>
+                      <p:childTnLst>
+                        <p:par>
+                          <p:cTn id="4" fill="hold">
+                            <p:stCondLst>
+                              <p:cond delay="0"/>
+                            </p:stCondLst>
+                            <p:childTnLst>
+                              <p:par>
+                                <p:cTn id="5" presetID="1" presetClass="entr" presetSubtype="0" fill="hold" nodeType="clickEffect">
+                                  <p:stCondLst>
+                                    <p:cond delay="0"/>
+                                  </p:stCondLst>
+                                  <p:childTnLst>
+                                    <p:set>
+                                      <p:cBhvr>
+                                        <p:cTn id="6" dur="1" fill="hold">
+                                          <p:stCondLst>
+                                            <p:cond delay="0"/>
+                                          </p:stCondLst>
+                                        </p:cTn>
+                                        <p:tgtEl>
+                                          <p:spTgt spid="11"/>
+                                        </p:tgtEl>
+                                        <p:attrNameLst>
+                                          <p:attrName>style.visibility</p:attrName>
+                                        </p:attrNameLst>
+                                      </p:cBhvr>
+                                      <p:to>
+                                        <p:strVal val="visible"/>
+                                      </p:to>
+                                    </p:set>
+                                  </p:childTnLst>
+                                </p:cTn>
+                              </p:par>
+                            </p:childTnLst>
+                          </p:cTn>
+                        </p:par>
+                      </p:childTnLst>
+                    </p:cTn>
+                  </p:par>
+                </p:childTnLst>
+              </p:cTn>
+              <p:prevCondLst>
+                <p:cond evt="onPrev" delay="0">
+                  <p:tgtEl>
+                    <p:sldTgt/>
+                  </p:tgtEl>
+                </p:cond>
+              </p:prevCondLst>
+              <p:nextCondLst>
+                <p:cond evt="onNext" delay="0">
+                  <p:tgtEl>
+                    <p:sldTgt/>
+                  </p:tgtEl>
+                </p:cond>
+              </p:nextCondLst>
+            </p:seq>
+          </p:childTnLst>
+        </p:cTn>
+      </p:par>
+    </p:tnLst>
+  </p:timing>
 </p:sld>
 </file>
 
@@ -44106,8 +44333,8 @@
               <a:buNone/>
             </a:pPr>
             <a:fld id="{ACCF4CD7-22F3-448F-A2F8-21045198B6EC}" type="datetime1">
-              <a:rPr/>
-              <a:t>7/28/2026</a:t>
+              <a:rPr lang="en-US"/>
+              <a:t>7/29/2026</a:t>
             </a:fld>
             <a:endParaRPr/>
           </a:p>
@@ -44677,8 +44904,8 @@
               <a:buNone/>
             </a:pPr>
             <a:fld id="{10E68C69-0D3D-4170-8BF5-E192BB9155EB}" type="datetime1">
-              <a:rPr/>
-              <a:t>7/28/2026</a:t>
+              <a:rPr lang="en-US"/>
+              <a:t>7/29/2026</a:t>
             </a:fld>
             <a:endParaRPr/>
           </a:p>
@@ -45466,8 +45693,8 @@
               <a:buNone/>
             </a:pPr>
             <a:fld id="{7A779501-FF33-46A6-921C-91B2A6192E21}" type="datetime1">
-              <a:rPr/>
-              <a:t>7/28/2026</a:t>
+              <a:rPr lang="en-US"/>
+              <a:t>7/29/2026</a:t>
             </a:fld>
             <a:endParaRPr/>
           </a:p>
@@ -46413,8 +46640,8 @@
               <a:buNone/>
             </a:pPr>
             <a:fld id="{E63B002D-9A69-4D08-87B1-767D79A98552}" type="datetime1">
-              <a:rPr/>
-              <a:t>7/28/2026</a:t>
+              <a:rPr lang="en-US"/>
+              <a:t>7/29/2026</a:t>
             </a:fld>
             <a:endParaRPr/>
           </a:p>
@@ -46803,8 +47030,8 @@
               <a:buNone/>
             </a:pPr>
             <a:fld id="{0E45333D-1186-4EC7-854F-8479B3903294}" type="datetime1">
-              <a:rPr/>
-              <a:t>7/28/2026</a:t>
+              <a:rPr lang="en-US"/>
+              <a:t>7/29/2026</a:t>
             </a:fld>
             <a:endParaRPr/>
           </a:p>
@@ -48000,8 +48227,8 @@
               <a:buNone/>
             </a:pPr>
             <a:fld id="{606C2783-BDB9-4851-9709-59B587488346}" type="datetime1">
-              <a:rPr/>
-              <a:t>7/28/2026</a:t>
+              <a:rPr lang="en-US"/>
+              <a:t>7/29/2026</a:t>
             </a:fld>
             <a:endParaRPr/>
           </a:p>

--- a/slides/intro_to_deep_learning.pptx
+++ b/slides/intro_to_deep_learning.pptx
@@ -142,6 +142,35 @@
     </p:ext>
   </p:extLst>
 </p:presentation>
+</file>
+
+<file path=ppt/changesInfos/changesInfo1.xml><?xml version="1.0" encoding="utf-8"?>
+<pc:chgInfo xmlns:a="http://schemas.openxmlformats.org/drawingml/2006/main" xmlns:r="http://schemas.openxmlformats.org/officeDocument/2006/relationships" xmlns:ac="http://schemas.microsoft.com/office/drawing/2013/main/command" xmlns:pc="http://schemas.microsoft.com/office/powerpoint/2013/main/command">
+  <pc:docChgLst>
+    <pc:chgData name="Bradley Martin" userId="f8e117e3-5a7e-48dd-9ad1-65645ed54438" providerId="ADAL" clId="{C5D7457D-9C93-4A7E-BA4C-910ECB6C291C}"/>
+    <pc:docChg chg="modSld">
+      <pc:chgData name="Bradley Martin" userId="f8e117e3-5a7e-48dd-9ad1-65645ed54438" providerId="ADAL" clId="{C5D7457D-9C93-4A7E-BA4C-910ECB6C291C}" dt="2026-07-29T13:32:42.545" v="1" actId="115"/>
+      <pc:docMkLst>
+        <pc:docMk/>
+      </pc:docMkLst>
+      <pc:sldChg chg="modSp mod">
+        <pc:chgData name="Bradley Martin" userId="f8e117e3-5a7e-48dd-9ad1-65645ed54438" providerId="ADAL" clId="{C5D7457D-9C93-4A7E-BA4C-910ECB6C291C}" dt="2026-07-29T13:32:42.545" v="1" actId="115"/>
+        <pc:sldMkLst>
+          <pc:docMk/>
+          <pc:sldMk cId="3052936034" sldId="257"/>
+        </pc:sldMkLst>
+        <pc:spChg chg="mod">
+          <ac:chgData name="Bradley Martin" userId="f8e117e3-5a7e-48dd-9ad1-65645ed54438" providerId="ADAL" clId="{C5D7457D-9C93-4A7E-BA4C-910ECB6C291C}" dt="2026-07-29T13:32:42.545" v="1" actId="115"/>
+          <ac:spMkLst>
+            <pc:docMk/>
+            <pc:sldMk cId="3052936034" sldId="257"/>
+            <ac:spMk id="21" creationId="{9C8666DD-AC7F-9B03-33EE-26F7B383C8FF}"/>
+          </ac:spMkLst>
+        </pc:spChg>
+      </pc:sldChg>
+    </pc:docChg>
+  </pc:docChgLst>
+</pc:chgInfo>
 </file>
 
 <file path=ppt/notesMasters/notesMaster1.xml><?xml version="1.0" encoding="utf-8"?>
@@ -37034,34 +37063,38 @@
               <a:t>Practical notebooks: </a:t>
             </a:r>
             <a:r>
-              <a:rPr lang="en-GB" sz="1800" dirty="0" err="1"/>
+              <a:rPr lang="en-GB" sz="1800" u="sng" dirty="0" err="1"/>
               <a:t>load_and</a:t>
             </a:r>
             <a:r>
+              <a:rPr lang="en-GB" sz="1800" u="sng" dirty="0"/>
+              <a:t> </a:t>
+            </a:r>
+            <a:r>
+              <a:rPr lang="en-GB" sz="1800" u="sng" dirty="0" err="1"/>
+              <a:t>generate.ipynb</a:t>
+            </a:r>
+            <a:r>
+              <a:rPr lang="en-GB" sz="1800" u="sng" dirty="0"/>
+              <a:t> </a:t>
+            </a:r>
+            <a:r>
               <a:rPr lang="en-GB" sz="1800" dirty="0"/>
+              <a:t>and </a:t>
+            </a:r>
+            <a:r>
+              <a:rPr lang="en-GB" sz="1800" u="sng" dirty="0" err="1"/>
+              <a:t>Z_finetune_and</a:t>
+            </a:r>
+            <a:r>
+              <a:rPr lang="en-GB" sz="1800" u="sng" dirty="0"/>
               <a:t> </a:t>
             </a:r>
             <a:r>
-              <a:rPr lang="en-GB" sz="1800" dirty="0" err="1"/>
-              <a:t>generate.ipynb</a:t>
-            </a:r>
-            <a:r>
-              <a:rPr lang="en-GB" sz="1800" dirty="0"/>
-              <a:t> and </a:t>
-            </a:r>
-            <a:r>
-              <a:rPr lang="en-GB" sz="1800" dirty="0" err="1"/>
-              <a:t>Z_finetune_and</a:t>
-            </a:r>
-            <a:r>
-              <a:rPr lang="en-GB" sz="1800" dirty="0"/>
-              <a:t> </a:t>
-            </a:r>
-            <a:r>
-              <a:rPr lang="en-GB" sz="1800" dirty="0" err="1"/>
+              <a:rPr lang="en-GB" sz="1800" u="sng" dirty="0" err="1"/>
               <a:t>conditioning.ipynb</a:t>
             </a:r>
-            <a:endParaRPr lang="en-GB" sz="1800" dirty="0"/>
+            <a:endParaRPr lang="en-GB" sz="1800" u="sng" dirty="0"/>
           </a:p>
         </p:txBody>
       </p:sp>

--- a/slides/intro_to_deep_learning.pptx
+++ b/slides/intro_to_deep_learning.pptx
@@ -2,42 +2,42 @@
 <file path=ppt/presentation.xml><?xml version="1.0" encoding="utf-8"?>
 <p:presentation xmlns:a="http://schemas.openxmlformats.org/drawingml/2006/main" xmlns:r="http://schemas.openxmlformats.org/officeDocument/2006/relationships" xmlns:p="http://schemas.openxmlformats.org/presentationml/2006/main">
   <p:sldMasterIdLst>
-    <p:sldMasterId id="2147483648" r:id="rId1"/>
-    <p:sldMasterId id="2147483660" r:id="rId2"/>
+    <p:sldMasterId id="2147483648" r:id="rId4"/>
+    <p:sldMasterId id="2147483660" r:id="rId5"/>
   </p:sldMasterIdLst>
   <p:notesMasterIdLst>
-    <p:notesMasterId r:id="rId32"/>
+    <p:notesMasterId r:id="rId35"/>
   </p:notesMasterIdLst>
   <p:sldIdLst>
-    <p:sldId id="256" r:id="rId3"/>
-    <p:sldId id="257" r:id="rId4"/>
-    <p:sldId id="284" r:id="rId5"/>
-    <p:sldId id="258" r:id="rId6"/>
-    <p:sldId id="259" r:id="rId7"/>
-    <p:sldId id="260" r:id="rId8"/>
-    <p:sldId id="261" r:id="rId9"/>
-    <p:sldId id="262" r:id="rId10"/>
-    <p:sldId id="263" r:id="rId11"/>
-    <p:sldId id="264" r:id="rId12"/>
-    <p:sldId id="265" r:id="rId13"/>
-    <p:sldId id="266" r:id="rId14"/>
-    <p:sldId id="267" r:id="rId15"/>
-    <p:sldId id="268" r:id="rId16"/>
-    <p:sldId id="269" r:id="rId17"/>
-    <p:sldId id="270" r:id="rId18"/>
-    <p:sldId id="271" r:id="rId19"/>
-    <p:sldId id="272" r:id="rId20"/>
-    <p:sldId id="273" r:id="rId21"/>
-    <p:sldId id="274" r:id="rId22"/>
-    <p:sldId id="275" r:id="rId23"/>
-    <p:sldId id="276" r:id="rId24"/>
-    <p:sldId id="277" r:id="rId25"/>
-    <p:sldId id="278" r:id="rId26"/>
-    <p:sldId id="279" r:id="rId27"/>
-    <p:sldId id="280" r:id="rId28"/>
-    <p:sldId id="281" r:id="rId29"/>
-    <p:sldId id="282" r:id="rId30"/>
-    <p:sldId id="283" r:id="rId31"/>
+    <p:sldId id="256" r:id="rId6"/>
+    <p:sldId id="257" r:id="rId7"/>
+    <p:sldId id="284" r:id="rId8"/>
+    <p:sldId id="258" r:id="rId9"/>
+    <p:sldId id="259" r:id="rId10"/>
+    <p:sldId id="260" r:id="rId11"/>
+    <p:sldId id="261" r:id="rId12"/>
+    <p:sldId id="262" r:id="rId13"/>
+    <p:sldId id="263" r:id="rId14"/>
+    <p:sldId id="264" r:id="rId15"/>
+    <p:sldId id="265" r:id="rId16"/>
+    <p:sldId id="266" r:id="rId17"/>
+    <p:sldId id="267" r:id="rId18"/>
+    <p:sldId id="268" r:id="rId19"/>
+    <p:sldId id="269" r:id="rId20"/>
+    <p:sldId id="270" r:id="rId21"/>
+    <p:sldId id="271" r:id="rId22"/>
+    <p:sldId id="272" r:id="rId23"/>
+    <p:sldId id="273" r:id="rId24"/>
+    <p:sldId id="274" r:id="rId25"/>
+    <p:sldId id="275" r:id="rId26"/>
+    <p:sldId id="276" r:id="rId27"/>
+    <p:sldId id="277" r:id="rId28"/>
+    <p:sldId id="278" r:id="rId29"/>
+    <p:sldId id="279" r:id="rId30"/>
+    <p:sldId id="280" r:id="rId31"/>
+    <p:sldId id="281" r:id="rId32"/>
+    <p:sldId id="282" r:id="rId33"/>
+    <p:sldId id="283" r:id="rId34"/>
   </p:sldIdLst>
   <p:sldSz cx="12192000" cy="6858000"/>
   <p:notesSz cx="6858000" cy="9144000"/>
@@ -142,35 +142,6 @@
     </p:ext>
   </p:extLst>
 </p:presentation>
-</file>
-
-<file path=ppt/changesInfos/changesInfo1.xml><?xml version="1.0" encoding="utf-8"?>
-<pc:chgInfo xmlns:a="http://schemas.openxmlformats.org/drawingml/2006/main" xmlns:r="http://schemas.openxmlformats.org/officeDocument/2006/relationships" xmlns:ac="http://schemas.microsoft.com/office/drawing/2013/main/command" xmlns:pc="http://schemas.microsoft.com/office/powerpoint/2013/main/command">
-  <pc:docChgLst>
-    <pc:chgData name="Bradley Martin" userId="f8e117e3-5a7e-48dd-9ad1-65645ed54438" providerId="ADAL" clId="{C5D7457D-9C93-4A7E-BA4C-910ECB6C291C}"/>
-    <pc:docChg chg="modSld">
-      <pc:chgData name="Bradley Martin" userId="f8e117e3-5a7e-48dd-9ad1-65645ed54438" providerId="ADAL" clId="{C5D7457D-9C93-4A7E-BA4C-910ECB6C291C}" dt="2026-07-29T13:32:42.545" v="1" actId="115"/>
-      <pc:docMkLst>
-        <pc:docMk/>
-      </pc:docMkLst>
-      <pc:sldChg chg="modSp mod">
-        <pc:chgData name="Bradley Martin" userId="f8e117e3-5a7e-48dd-9ad1-65645ed54438" providerId="ADAL" clId="{C5D7457D-9C93-4A7E-BA4C-910ECB6C291C}" dt="2026-07-29T13:32:42.545" v="1" actId="115"/>
-        <pc:sldMkLst>
-          <pc:docMk/>
-          <pc:sldMk cId="3052936034" sldId="257"/>
-        </pc:sldMkLst>
-        <pc:spChg chg="mod">
-          <ac:chgData name="Bradley Martin" userId="f8e117e3-5a7e-48dd-9ad1-65645ed54438" providerId="ADAL" clId="{C5D7457D-9C93-4A7E-BA4C-910ECB6C291C}" dt="2026-07-29T13:32:42.545" v="1" actId="115"/>
-          <ac:spMkLst>
-            <pc:docMk/>
-            <pc:sldMk cId="3052936034" sldId="257"/>
-            <ac:spMk id="21" creationId="{9C8666DD-AC7F-9B03-33EE-26F7B383C8FF}"/>
-          </ac:spMkLst>
-        </pc:spChg>
-      </pc:sldChg>
-    </pc:docChg>
-  </pc:docChgLst>
-</pc:chgInfo>
 </file>
 
 <file path=ppt/notesMasters/notesMaster1.xml><?xml version="1.0" encoding="utf-8"?>
@@ -49077,4 +49048,257 @@
   <a:objectDefaults/>
   <a:extraClrSchemeLst/>
 </a:theme>
+</file>
+
+<file path=customXml/item1.xml><?xml version="1.0" encoding="utf-8"?>
+<ct:contentTypeSchema xmlns:ct="http://schemas.microsoft.com/office/2006/metadata/contentType" xmlns:ma="http://schemas.microsoft.com/office/2006/metadata/properties/metaAttributes" ct:_="" ma:_="" ma:contentTypeName="Document" ma:contentTypeID="0x010100509D1D3A1696554A89A85FA668FFBF61" ma:contentTypeVersion="12" ma:contentTypeDescription="Create a new document." ma:contentTypeScope="" ma:versionID="ed7eeb65af50cb413bc13aa20f3693e6">
+  <xsd:schema xmlns:xsd="http://www.w3.org/2001/XMLSchema" xmlns:xs="http://www.w3.org/2001/XMLSchema" xmlns:p="http://schemas.microsoft.com/office/2006/metadata/properties" xmlns:ns3="49d083a4-dc63-4c4a-9c85-664a0adb3eb9" targetNamespace="http://schemas.microsoft.com/office/2006/metadata/properties" ma:root="true" ma:fieldsID="34599c59031f89219ebf5fb7fb836a4c" ns3:_="">
+    <xsd:import namespace="49d083a4-dc63-4c4a-9c85-664a0adb3eb9"/>
+    <xsd:element name="properties">
+      <xsd:complexType>
+        <xsd:sequence>
+          <xsd:element name="documentManagement">
+            <xsd:complexType>
+              <xsd:all>
+                <xsd:element ref="ns3:MediaServiceDateTaken" minOccurs="0"/>
+                <xsd:element ref="ns3:MediaServiceMetadata" minOccurs="0"/>
+                <xsd:element ref="ns3:MediaServiceFastMetadata" minOccurs="0"/>
+                <xsd:element ref="ns3:MediaServiceSearchProperties" minOccurs="0"/>
+                <xsd:element ref="ns3:MediaServiceObjectDetectorVersions" minOccurs="0"/>
+                <xsd:element ref="ns3:MediaServiceSystemTags" minOccurs="0"/>
+                <xsd:element ref="ns3:MediaServiceGenerationTime" minOccurs="0"/>
+                <xsd:element ref="ns3:MediaServiceEventHashCode" minOccurs="0"/>
+                <xsd:element ref="ns3:MediaServiceOCR" minOccurs="0"/>
+                <xsd:element ref="ns3:_activity" minOccurs="0"/>
+                <xsd:element ref="ns3:MediaServiceLocation" minOccurs="0"/>
+                <xsd:element ref="ns3:MediaServiceBillingMetadata" minOccurs="0"/>
+              </xsd:all>
+            </xsd:complexType>
+          </xsd:element>
+        </xsd:sequence>
+      </xsd:complexType>
+    </xsd:element>
+  </xsd:schema>
+  <xsd:schema xmlns:xsd="http://www.w3.org/2001/XMLSchema" xmlns:xs="http://www.w3.org/2001/XMLSchema" xmlns:dms="http://schemas.microsoft.com/office/2006/documentManagement/types" xmlns:pc="http://schemas.microsoft.com/office/infopath/2007/PartnerControls" targetNamespace="49d083a4-dc63-4c4a-9c85-664a0adb3eb9" elementFormDefault="qualified">
+    <xsd:import namespace="http://schemas.microsoft.com/office/2006/documentManagement/types"/>
+    <xsd:import namespace="http://schemas.microsoft.com/office/infopath/2007/PartnerControls"/>
+    <xsd:element name="MediaServiceDateTaken" ma:index="8" nillable="true" ma:displayName="MediaServiceDateTaken" ma:hidden="true" ma:indexed="true" ma:internalName="MediaServiceDateTaken" ma:readOnly="true">
+      <xsd:simpleType>
+        <xsd:restriction base="dms:Text"/>
+      </xsd:simpleType>
+    </xsd:element>
+    <xsd:element name="MediaServiceMetadata" ma:index="9" nillable="true" ma:displayName="MediaServiceMetadata" ma:hidden="true" ma:internalName="MediaServiceMetadata" ma:readOnly="true">
+      <xsd:simpleType>
+        <xsd:restriction base="dms:Note"/>
+      </xsd:simpleType>
+    </xsd:element>
+    <xsd:element name="MediaServiceFastMetadata" ma:index="10" nillable="true" ma:displayName="MediaServiceFastMetadata" ma:hidden="true" ma:internalName="MediaServiceFastMetadata" ma:readOnly="true">
+      <xsd:simpleType>
+        <xsd:restriction base="dms:Note"/>
+      </xsd:simpleType>
+    </xsd:element>
+    <xsd:element name="MediaServiceSearchProperties" ma:index="11" nillable="true" ma:displayName="MediaServiceSearchProperties" ma:hidden="true" ma:internalName="MediaServiceSearchProperties" ma:readOnly="true">
+      <xsd:simpleType>
+        <xsd:restriction base="dms:Note"/>
+      </xsd:simpleType>
+    </xsd:element>
+    <xsd:element name="MediaServiceObjectDetectorVersions" ma:index="12" nillable="true" ma:displayName="MediaServiceObjectDetectorVersions" ma:description="" ma:hidden="true" ma:indexed="true" ma:internalName="MediaServiceObjectDetectorVersions" ma:readOnly="true">
+      <xsd:simpleType>
+        <xsd:restriction base="dms:Text"/>
+      </xsd:simpleType>
+    </xsd:element>
+    <xsd:element name="MediaServiceSystemTags" ma:index="13" nillable="true" ma:displayName="MediaServiceSystemTags" ma:hidden="true" ma:internalName="MediaServiceSystemTags" ma:readOnly="true">
+      <xsd:simpleType>
+        <xsd:restriction base="dms:Note"/>
+      </xsd:simpleType>
+    </xsd:element>
+    <xsd:element name="MediaServiceGenerationTime" ma:index="14" nillable="true" ma:displayName="MediaServiceGenerationTime" ma:hidden="true" ma:internalName="MediaServiceGenerationTime" ma:readOnly="true">
+      <xsd:simpleType>
+        <xsd:restriction base="dms:Text"/>
+      </xsd:simpleType>
+    </xsd:element>
+    <xsd:element name="MediaServiceEventHashCode" ma:index="15" nillable="true" ma:displayName="MediaServiceEventHashCode" ma:hidden="true" ma:internalName="MediaServiceEventHashCode" ma:readOnly="true">
+      <xsd:simpleType>
+        <xsd:restriction base="dms:Text"/>
+      </xsd:simpleType>
+    </xsd:element>
+    <xsd:element name="MediaServiceOCR" ma:index="16" nillable="true" ma:displayName="Extracted Text" ma:internalName="MediaServiceOCR" ma:readOnly="true">
+      <xsd:simpleType>
+        <xsd:restriction base="dms:Note">
+          <xsd:maxLength value="255"/>
+        </xsd:restriction>
+      </xsd:simpleType>
+    </xsd:element>
+    <xsd:element name="_activity" ma:index="17" nillable="true" ma:displayName="_activity" ma:hidden="true" ma:internalName="_activity">
+      <xsd:simpleType>
+        <xsd:restriction base="dms:Note"/>
+      </xsd:simpleType>
+    </xsd:element>
+    <xsd:element name="MediaServiceLocation" ma:index="18" nillable="true" ma:displayName="Location" ma:description="" ma:indexed="true" ma:internalName="MediaServiceLocation" ma:readOnly="true">
+      <xsd:simpleType>
+        <xsd:restriction base="dms:Text"/>
+      </xsd:simpleType>
+    </xsd:element>
+    <xsd:element name="MediaServiceBillingMetadata" ma:index="19" nillable="true" ma:displayName="MediaServiceBillingMetadata" ma:hidden="true" ma:internalName="MediaServiceBillingMetadata" ma:readOnly="true">
+      <xsd:simpleType>
+        <xsd:restriction base="dms:Note"/>
+      </xsd:simpleType>
+    </xsd:element>
+  </xsd:schema>
+  <xsd:schema xmlns="http://schemas.openxmlformats.org/package/2006/metadata/core-properties" xmlns:xsd="http://www.w3.org/2001/XMLSchema" xmlns:xsi="http://www.w3.org/2001/XMLSchema-instance" xmlns:dc="http://purl.org/dc/elements/1.1/" xmlns:dcterms="http://purl.org/dc/terms/" xmlns:odoc="http://schemas.microsoft.com/internal/obd" targetNamespace="http://schemas.openxmlformats.org/package/2006/metadata/core-properties" elementFormDefault="qualified" attributeFormDefault="unqualified" blockDefault="#all">
+    <xsd:import namespace="http://purl.org/dc/elements/1.1/" schemaLocation="http://dublincore.org/schemas/xmls/qdc/2003/04/02/dc.xsd"/>
+    <xsd:import namespace="http://purl.org/dc/terms/" schemaLocation="http://dublincore.org/schemas/xmls/qdc/2003/04/02/dcterms.xsd"/>
+    <xsd:element name="coreProperties" type="CT_coreProperties"/>
+    <xsd:complexType name="CT_coreProperties">
+      <xsd:all>
+        <xsd:element ref="dc:creator" minOccurs="0" maxOccurs="1"/>
+        <xsd:element ref="dcterms:created" minOccurs="0" maxOccurs="1"/>
+        <xsd:element ref="dc:identifier" minOccurs="0" maxOccurs="1"/>
+        <xsd:element name="contentType" minOccurs="0" maxOccurs="1" type="xsd:string" ma:index="0" ma:displayName="Content Type"/>
+        <xsd:element ref="dc:title" minOccurs="0" maxOccurs="1" ma:index="4" ma:displayName="Title"/>
+        <xsd:element ref="dc:subject" minOccurs="0" maxOccurs="1"/>
+        <xsd:element ref="dc:description" minOccurs="0" maxOccurs="1"/>
+        <xsd:element name="keywords" minOccurs="0" maxOccurs="1" type="xsd:string"/>
+        <xsd:element ref="dc:language" minOccurs="0" maxOccurs="1"/>
+        <xsd:element name="category" minOccurs="0" maxOccurs="1" type="xsd:string"/>
+        <xsd:element name="version" minOccurs="0" maxOccurs="1" type="xsd:string"/>
+        <xsd:element name="revision" minOccurs="0" maxOccurs="1" type="xsd:string">
+          <xsd:annotation>
+            <xsd:documentation>
+                        This value indicates the number of saves or revisions. The application is responsible for updating this value after each revision.
+                    </xsd:documentation>
+          </xsd:annotation>
+        </xsd:element>
+        <xsd:element name="lastModifiedBy" minOccurs="0" maxOccurs="1" type="xsd:string"/>
+        <xsd:element ref="dcterms:modified" minOccurs="0" maxOccurs="1"/>
+        <xsd:element name="contentStatus" minOccurs="0" maxOccurs="1" type="xsd:string"/>
+      </xsd:all>
+    </xsd:complexType>
+  </xsd:schema>
+  <xs:schema xmlns:pc="http://schemas.microsoft.com/office/infopath/2007/PartnerControls" xmlns:xs="http://www.w3.org/2001/XMLSchema" targetNamespace="http://schemas.microsoft.com/office/infopath/2007/PartnerControls" elementFormDefault="qualified" attributeFormDefault="unqualified">
+    <xs:element name="Person">
+      <xs:complexType>
+        <xs:sequence>
+          <xs:element ref="pc:DisplayName" minOccurs="0"/>
+          <xs:element ref="pc:AccountId" minOccurs="0"/>
+          <xs:element ref="pc:AccountType" minOccurs="0"/>
+        </xs:sequence>
+      </xs:complexType>
+    </xs:element>
+    <xs:element name="DisplayName" type="xs:string"/>
+    <xs:element name="AccountId" type="xs:string"/>
+    <xs:element name="AccountType" type="xs:string"/>
+    <xs:element name="BDCAssociatedEntity">
+      <xs:complexType>
+        <xs:sequence>
+          <xs:element ref="pc:BDCEntity" minOccurs="0" maxOccurs="unbounded"/>
+        </xs:sequence>
+        <xs:attribute ref="pc:EntityNamespace"/>
+        <xs:attribute ref="pc:EntityName"/>
+        <xs:attribute ref="pc:SystemInstanceName"/>
+        <xs:attribute ref="pc:AssociationName"/>
+      </xs:complexType>
+    </xs:element>
+    <xs:attribute name="EntityNamespace" type="xs:string"/>
+    <xs:attribute name="EntityName" type="xs:string"/>
+    <xs:attribute name="SystemInstanceName" type="xs:string"/>
+    <xs:attribute name="AssociationName" type="xs:string"/>
+    <xs:element name="BDCEntity">
+      <xs:complexType>
+        <xs:sequence>
+          <xs:element ref="pc:EntityDisplayName" minOccurs="0"/>
+          <xs:element ref="pc:EntityInstanceReference" minOccurs="0"/>
+          <xs:element ref="pc:EntityId1" minOccurs="0"/>
+          <xs:element ref="pc:EntityId2" minOccurs="0"/>
+          <xs:element ref="pc:EntityId3" minOccurs="0"/>
+          <xs:element ref="pc:EntityId4" minOccurs="0"/>
+          <xs:element ref="pc:EntityId5" minOccurs="0"/>
+        </xs:sequence>
+      </xs:complexType>
+    </xs:element>
+    <xs:element name="EntityDisplayName" type="xs:string"/>
+    <xs:element name="EntityInstanceReference" type="xs:string"/>
+    <xs:element name="EntityId1" type="xs:string"/>
+    <xs:element name="EntityId2" type="xs:string"/>
+    <xs:element name="EntityId3" type="xs:string"/>
+    <xs:element name="EntityId4" type="xs:string"/>
+    <xs:element name="EntityId5" type="xs:string"/>
+    <xs:element name="Terms">
+      <xs:complexType>
+        <xs:sequence>
+          <xs:element ref="pc:TermInfo" minOccurs="0" maxOccurs="unbounded"/>
+        </xs:sequence>
+      </xs:complexType>
+    </xs:element>
+    <xs:element name="TermInfo">
+      <xs:complexType>
+        <xs:sequence>
+          <xs:element ref="pc:TermName" minOccurs="0"/>
+          <xs:element ref="pc:TermId" minOccurs="0"/>
+        </xs:sequence>
+      </xs:complexType>
+    </xs:element>
+    <xs:element name="TermName" type="xs:string"/>
+    <xs:element name="TermId" type="xs:string"/>
+  </xs:schema>
+</ct:contentTypeSchema>
+</file>
+
+<file path=customXml/item2.xml><?xml version="1.0" encoding="utf-8"?>
+<?mso-contentType ?>
+<FormTemplates xmlns="http://schemas.microsoft.com/sharepoint/v3/contenttype/forms">
+  <Display>DocumentLibraryForm</Display>
+  <Edit>DocumentLibraryForm</Edit>
+  <New>DocumentLibraryForm</New>
+</FormTemplates>
+</file>
+
+<file path=customXml/item3.xml><?xml version="1.0" encoding="utf-8"?>
+<p:properties xmlns:p="http://schemas.microsoft.com/office/2006/metadata/properties" xmlns:xsi="http://www.w3.org/2001/XMLSchema-instance" xmlns:pc="http://schemas.microsoft.com/office/infopath/2007/PartnerControls">
+  <documentManagement>
+    <_activity xmlns="49d083a4-dc63-4c4a-9c85-664a0adb3eb9" xsi:nil="true"/>
+  </documentManagement>
+</p:properties>
+</file>
+
+<file path=customXml/itemProps1.xml><?xml version="1.0" encoding="utf-8"?>
+<ds:datastoreItem xmlns:ds="http://schemas.openxmlformats.org/officeDocument/2006/customXml" ds:itemID="{FC1F7E53-CB0F-4A98-ACC0-BF325B2E173B}">
+  <ds:schemaRefs>
+    <ds:schemaRef ds:uri="http://schemas.microsoft.com/office/2006/metadata/contentType"/>
+    <ds:schemaRef ds:uri="http://schemas.microsoft.com/office/2006/metadata/properties/metaAttributes"/>
+    <ds:schemaRef ds:uri="http://www.w3.org/2001/XMLSchema"/>
+    <ds:schemaRef ds:uri="http://schemas.microsoft.com/office/2006/metadata/properties"/>
+    <ds:schemaRef ds:uri="49d083a4-dc63-4c4a-9c85-664a0adb3eb9"/>
+    <ds:schemaRef ds:uri="http://schemas.microsoft.com/office/2006/documentManagement/types"/>
+    <ds:schemaRef ds:uri="http://schemas.microsoft.com/office/infopath/2007/PartnerControls"/>
+    <ds:schemaRef ds:uri="http://schemas.openxmlformats.org/package/2006/metadata/core-properties"/>
+    <ds:schemaRef ds:uri="http://purl.org/dc/elements/1.1/"/>
+    <ds:schemaRef ds:uri="http://purl.org/dc/terms/"/>
+    <ds:schemaRef ds:uri="http://schemas.microsoft.com/internal/obd"/>
+  </ds:schemaRefs>
+</ds:datastoreItem>
+</file>
+
+<file path=customXml/itemProps2.xml><?xml version="1.0" encoding="utf-8"?>
+<ds:datastoreItem xmlns:ds="http://schemas.openxmlformats.org/officeDocument/2006/customXml" ds:itemID="{2527803F-6F00-4E82-9A64-4054E0A20432}">
+  <ds:schemaRefs>
+    <ds:schemaRef ds:uri="http://schemas.microsoft.com/sharepoint/v3/contenttype/forms"/>
+  </ds:schemaRefs>
+</ds:datastoreItem>
+</file>
+
+<file path=customXml/itemProps3.xml><?xml version="1.0" encoding="utf-8"?>
+<ds:datastoreItem xmlns:ds="http://schemas.openxmlformats.org/officeDocument/2006/customXml" ds:itemID="{443CB560-06BF-482D-B401-96D7F98963B5}">
+  <ds:schemaRefs>
+    <ds:schemaRef ds:uri="http://www.w3.org/XML/1998/namespace"/>
+    <ds:schemaRef ds:uri="http://purl.org/dc/terms/"/>
+    <ds:schemaRef ds:uri="http://purl.org/dc/dcmitype/"/>
+    <ds:schemaRef ds:uri="http://schemas.openxmlformats.org/package/2006/metadata/core-properties"/>
+    <ds:schemaRef ds:uri="http://schemas.microsoft.com/office/2006/documentManagement/types"/>
+    <ds:schemaRef ds:uri="http://purl.org/dc/elements/1.1/"/>
+    <ds:schemaRef ds:uri="http://schemas.microsoft.com/office/infopath/2007/PartnerControls"/>
+    <ds:schemaRef ds:uri="49d083a4-dc63-4c4a-9c85-664a0adb3eb9"/>
+    <ds:schemaRef ds:uri="http://schemas.microsoft.com/office/2006/metadata/properties"/>
+  </ds:schemaRefs>
+</ds:datastoreItem>
 </file>